--- a/site/clases/parte-2-deep-learning/121-custom-training-loops/clase-121-custom-training-loops-presentacion.pptx
+++ b/site/clases/parte-2-deep-learning/121-custom-training-loops/clase-121-custom-training-loops-presentacion.pptx
@@ -3272,7 +3272,7 @@
                 </a:solidFill>
                 <a:latin typeface="Segoe UI"/>
               </a:rPr>
-              <a:t>Parte: 2 — Deep Learning · Fuente: Géron, cap. 12 § Custom Training Loops + docs PyTorch, Lightning.  Duración estimada: 85 min.</a:t>
+              <a:t>Parte: 2 — Deep Learning · Fuente: Géron, cap. 12 § Custom Training Loops + docs PyTorch, Lightning.  Duración estimada: 85 min. · Nivel: Avanzado</a:t>
             </a:r>
           </a:p>
         </p:txBody>
@@ -3581,7 +3581,7 @@
                 </a:solidFill>
                 <a:latin typeface="Segoe UI"/>
               </a:rPr>
-              <a:t>Parte: 2 — Deep Learning · Fuente: Géron, cap. 12 § Custom Training Loops + docs PyTorch, Lightning.  Duración estimada: 85 min.</a:t>
+              <a:t>Parte: 2 — Deep Learning · Fuente: Géron, cap. 12 § Custom Training Loops + docs PyTorch, Lightning.  Duración estimada: 85 min. · Nivel: Avanzado</a:t>
             </a:r>
           </a:p>
         </p:txBody>
@@ -4910,7 +4910,368 @@
                 </a:solidFill>
                 <a:latin typeface="Courier New"/>
               </a:rPr>
-              <a:t># Imports y configuración inicial</a:t>
+              <a:t>import numpy as np</a:t>
+            </a:r>
+          </a:p>
+          <a:p>
+            <a:pPr>
+              <a:defRPr sz="1200" b="0">
+                <a:solidFill>
+                  <a:srgbClr val="F8FAFC"/>
+                </a:solidFill>
+                <a:latin typeface="Courier New"/>
+              </a:defRPr>
+            </a:pPr>
+            <a:r>
+              <a:rPr sz="1200" b="0">
+                <a:solidFill>
+                  <a:srgbClr val="F8FAFC"/>
+                </a:solidFill>
+                <a:latin typeface="Courier New"/>
+              </a:rPr>
+              <a:t>import tensorflow as tf</a:t>
+            </a:r>
+          </a:p>
+          <a:p>
+            <a:pPr>
+              <a:defRPr sz="1200" b="0">
+                <a:solidFill>
+                  <a:srgbClr val="F8FAFC"/>
+                </a:solidFill>
+                <a:latin typeface="Courier New"/>
+              </a:defRPr>
+            </a:pPr>
+            <a:r>
+              <a:rPr sz="1200" b="0">
+                <a:solidFill>
+                  <a:srgbClr val="F8FAFC"/>
+                </a:solidFill>
+                <a:latin typeface="Courier New"/>
+              </a:rPr>
+              <a:t>from tensorflow import keras</a:t>
+            </a:r>
+          </a:p>
+          <a:p>
+            <a:pPr>
+              <a:defRPr sz="1200" b="0">
+                <a:solidFill>
+                  <a:srgbClr val="F8FAFC"/>
+                </a:solidFill>
+                <a:latin typeface="Courier New"/>
+              </a:defRPr>
+            </a:pPr>
+            <a:r>
+              <a:rPr sz="1200" b="0">
+                <a:solidFill>
+                  <a:srgbClr val="F8FAFC"/>
+                </a:solidFill>
+                <a:latin typeface="Courier New"/>
+              </a:rPr>
+              <a:t>from tensorflow.keras import layers</a:t>
+            </a:r>
+          </a:p>
+          <a:p>
+            <a:pPr>
+              <a:defRPr sz="1200" b="0">
+                <a:solidFill>
+                  <a:srgbClr val="F8FAFC"/>
+                </a:solidFill>
+                <a:latin typeface="Courier New"/>
+              </a:defRPr>
+            </a:pPr>
+            <a:r>
+              <a:rPr sz="1200" b="0">
+                <a:solidFill>
+                  <a:srgbClr val="F8FAFC"/>
+                </a:solidFill>
+                <a:latin typeface="Courier New"/>
+              </a:rPr>
+              <a:t>keras.utils.set_random_seed(42)</a:t>
+            </a:r>
+          </a:p>
+          <a:p>
+            <a:pPr>
+              <a:defRPr sz="1200" b="0">
+                <a:solidFill>
+                  <a:srgbClr val="F8FAFC"/>
+                </a:solidFill>
+                <a:latin typeface="Courier New"/>
+              </a:defRPr>
+            </a:pPr>
+            <a:r>
+              <a:rPr sz="1200" b="0">
+                <a:solidFill>
+                  <a:srgbClr val="F8FAFC"/>
+                </a:solidFill>
+                <a:latin typeface="Courier New"/>
+              </a:rPr>
+              <a:t> </a:t>
+            </a:r>
+          </a:p>
+          <a:p>
+            <a:pPr>
+              <a:defRPr sz="1200" b="0">
+                <a:solidFill>
+                  <a:srgbClr val="F8FAFC"/>
+                </a:solidFill>
+                <a:latin typeface="Courier New"/>
+              </a:defRPr>
+            </a:pPr>
+            <a:r>
+              <a:rPr sz="1200" b="0">
+                <a:solidFill>
+                  <a:srgbClr val="F8FAFC"/>
+                </a:solidFill>
+                <a:latin typeface="Courier New"/>
+              </a:rPr>
+              <a:t>(X_tr, y_tr), (X_te, y_te) = keras.datasets.fashion_mnist.load_data()</a:t>
+            </a:r>
+          </a:p>
+          <a:p>
+            <a:pPr>
+              <a:defRPr sz="1200" b="0">
+                <a:solidFill>
+                  <a:srgbClr val="F8FAFC"/>
+                </a:solidFill>
+                <a:latin typeface="Courier New"/>
+              </a:defRPr>
+            </a:pPr>
+            <a:r>
+              <a:rPr sz="1200" b="0">
+                <a:solidFill>
+                  <a:srgbClr val="F8FAFC"/>
+                </a:solidFill>
+                <a:latin typeface="Courier New"/>
+              </a:rPr>
+              <a:t>X_tr = X_tr.reshape(-1, 784).astype("float32") / 255.0</a:t>
+            </a:r>
+          </a:p>
+          <a:p>
+            <a:pPr>
+              <a:defRPr sz="1200" b="0">
+                <a:solidFill>
+                  <a:srgbClr val="F8FAFC"/>
+                </a:solidFill>
+                <a:latin typeface="Courier New"/>
+              </a:defRPr>
+            </a:pPr>
+            <a:r>
+              <a:rPr sz="1200" b="0">
+                <a:solidFill>
+                  <a:srgbClr val="F8FAFC"/>
+                </a:solidFill>
+                <a:latin typeface="Courier New"/>
+              </a:rPr>
+              <a:t>X_te = X_te.reshape(-1, 784).astype("float32") / 255.0</a:t>
+            </a:r>
+          </a:p>
+          <a:p>
+            <a:pPr>
+              <a:defRPr sz="1200" b="0">
+                <a:solidFill>
+                  <a:srgbClr val="F8FAFC"/>
+                </a:solidFill>
+                <a:latin typeface="Courier New"/>
+              </a:defRPr>
+            </a:pPr>
+            <a:r>
+              <a:rPr sz="1200" b="0">
+                <a:solidFill>
+                  <a:srgbClr val="F8FAFC"/>
+                </a:solidFill>
+                <a:latin typeface="Courier New"/>
+              </a:rPr>
+              <a:t> </a:t>
+            </a:r>
+          </a:p>
+          <a:p>
+            <a:pPr>
+              <a:defRPr sz="1200" b="0">
+                <a:solidFill>
+                  <a:srgbClr val="F8FAFC"/>
+                </a:solidFill>
+                <a:latin typeface="Courier New"/>
+              </a:defRPr>
+            </a:pPr>
+            <a:r>
+              <a:rPr sz="1200" b="0">
+                <a:solidFill>
+                  <a:srgbClr val="F8FAFC"/>
+                </a:solidFill>
+                <a:latin typeface="Courier New"/>
+              </a:rPr>
+              <a:t>train_ds = (tf.data.Dataset.from_tensor_slices((X_tr, y_tr))</a:t>
+            </a:r>
+          </a:p>
+          <a:p>
+            <a:pPr>
+              <a:defRPr sz="1200" b="0">
+                <a:solidFill>
+                  <a:srgbClr val="F8FAFC"/>
+                </a:solidFill>
+                <a:latin typeface="Courier New"/>
+              </a:defRPr>
+            </a:pPr>
+            <a:r>
+              <a:rPr sz="1200" b="0">
+                <a:solidFill>
+                  <a:srgbClr val="F8FAFC"/>
+                </a:solidFill>
+                <a:latin typeface="Courier New"/>
+              </a:rPr>
+              <a:t>            .shuffle(1024).batch(128).prefetch(tf.data.AUTOTUNE))</a:t>
+            </a:r>
+          </a:p>
+          <a:p>
+            <a:pPr>
+              <a:defRPr sz="1200" b="0">
+                <a:solidFill>
+                  <a:srgbClr val="F8FAFC"/>
+                </a:solidFill>
+                <a:latin typeface="Courier New"/>
+              </a:defRPr>
+            </a:pPr>
+            <a:r>
+              <a:rPr sz="1200" b="0">
+                <a:solidFill>
+                  <a:srgbClr val="F8FAFC"/>
+                </a:solidFill>
+                <a:latin typeface="Courier New"/>
+              </a:rPr>
+              <a:t> </a:t>
+            </a:r>
+          </a:p>
+          <a:p>
+            <a:pPr>
+              <a:defRPr sz="1200" b="0">
+                <a:solidFill>
+                  <a:srgbClr val="F8FAFC"/>
+                </a:solidFill>
+                <a:latin typeface="Courier New"/>
+              </a:defRPr>
+            </a:pPr>
+            <a:r>
+              <a:rPr sz="1200" b="0">
+                <a:solidFill>
+                  <a:srgbClr val="F8FAFC"/>
+                </a:solidFill>
+                <a:latin typeface="Courier New"/>
+              </a:rPr>
+              <a:t>modelo = keras.Sequential([</a:t>
+            </a:r>
+          </a:p>
+          <a:p>
+            <a:pPr>
+              <a:defRPr sz="1200" b="0">
+                <a:solidFill>
+                  <a:srgbClr val="F8FAFC"/>
+                </a:solidFill>
+                <a:latin typeface="Courier New"/>
+              </a:defRPr>
+            </a:pPr>
+            <a:r>
+              <a:rPr sz="1200" b="0">
+                <a:solidFill>
+                  <a:srgbClr val="F8FAFC"/>
+                </a:solidFill>
+                <a:latin typeface="Courier New"/>
+              </a:rPr>
+              <a:t>    keras.Input((784,)),</a:t>
+            </a:r>
+          </a:p>
+          <a:p>
+            <a:pPr>
+              <a:defRPr sz="1200" b="0">
+                <a:solidFill>
+                  <a:srgbClr val="F8FAFC"/>
+                </a:solidFill>
+                <a:latin typeface="Courier New"/>
+              </a:defRPr>
+            </a:pPr>
+            <a:r>
+              <a:rPr sz="1200" b="0">
+                <a:solidFill>
+                  <a:srgbClr val="F8FAFC"/>
+                </a:solidFill>
+                <a:latin typeface="Courier New"/>
+              </a:rPr>
+              <a:t>    layers.Dense(256, activation="relu"),</a:t>
+            </a:r>
+          </a:p>
+          <a:p>
+            <a:pPr>
+              <a:defRPr sz="1200" b="0">
+                <a:solidFill>
+                  <a:srgbClr val="F8FAFC"/>
+                </a:solidFill>
+                <a:latin typeface="Courier New"/>
+              </a:defRPr>
+            </a:pPr>
+            <a:r>
+              <a:rPr sz="1200" b="0">
+                <a:solidFill>
+                  <a:srgbClr val="F8FAFC"/>
+                </a:solidFill>
+                <a:latin typeface="Courier New"/>
+              </a:rPr>
+              <a:t>    layers.Dense(128, activation="relu"),</a:t>
+            </a:r>
+          </a:p>
+          <a:p>
+            <a:pPr>
+              <a:defRPr sz="1200" b="0">
+                <a:solidFill>
+                  <a:srgbClr val="F8FAFC"/>
+                </a:solidFill>
+                <a:latin typeface="Courier New"/>
+              </a:defRPr>
+            </a:pPr>
+            <a:r>
+              <a:rPr sz="1200" b="0">
+                <a:solidFill>
+                  <a:srgbClr val="F8FAFC"/>
+                </a:solidFill>
+                <a:latin typeface="Courier New"/>
+              </a:rPr>
+              <a:t>    layers.Dense(10),                       # logits (sin softmax)</a:t>
+            </a:r>
+          </a:p>
+          <a:p>
+            <a:pPr>
+              <a:defRPr sz="1200" b="0">
+                <a:solidFill>
+                  <a:srgbClr val="F8FAFC"/>
+                </a:solidFill>
+                <a:latin typeface="Courier New"/>
+              </a:defRPr>
+            </a:pPr>
+            <a:r>
+              <a:rPr sz="1200" b="0">
+                <a:solidFill>
+                  <a:srgbClr val="F8FAFC"/>
+                </a:solidFill>
+                <a:latin typeface="Courier New"/>
+              </a:rPr>
+              <a:t>])</a:t>
+            </a:r>
+          </a:p>
+          <a:p>
+            <a:pPr>
+              <a:defRPr sz="1200" b="0">
+                <a:solidFill>
+                  <a:srgbClr val="F8FAFC"/>
+                </a:solidFill>
+                <a:latin typeface="Courier New"/>
+              </a:defRPr>
+            </a:pPr>
+            <a:r>
+              <a:rPr sz="1200" b="0">
+                <a:solidFill>
+                  <a:srgbClr val="F8FAFC"/>
+                </a:solidFill>
+                <a:latin typeface="Courier New"/>
+              </a:rPr>
+              <a:t>print("batches por época:", len(train_ds))</a:t>
             </a:r>
           </a:p>
         </p:txBody>
